--- a/a7/build/out/u6/A7 6.04 Pythagorean Theorem in Real-World Problems - Slides.pptx
+++ b/a7/build/out/u6/A7 6.04 Pythagorean Theorem in Real-World Problems - Slides.pptx
@@ -3695,7 +3695,7 @@
                 </a:solidFill>
                 <a:latin typeface="Lexend"/>
               </a:rPr>
-              <a:t>A computer screen is 7 in tall and 10 in wide.</a:t>
+              <a:t>A computer screen is 7 inches tall and 10 inches wide.</a:t>
             </a:r>
           </a:p>
         </p:txBody>
@@ -3993,7 +3993,7 @@
                 </a:solidFill>
                 <a:latin typeface="Lexend"/>
               </a:rPr>
-              <a:t>A computer screen is 7 in tall and 10 in wide.</a:t>
+              <a:t>A computer screen is 7 inches tall and 10 inches wide.</a:t>
             </a:r>
           </a:p>
         </p:txBody>
@@ -5686,7 +5686,7 @@
                 </a:solidFill>
                 <a:latin typeface="Lexend"/>
               </a:rPr>
-              <a:t>A tablet screen is 6 in wide and 8 in tall.</a:t>
+              <a:t>A tablet screen is 6 inches wide and 8 inches tall.</a:t>
             </a:r>
           </a:p>
         </p:txBody>
@@ -6043,7 +6043,7 @@
                 </a:solidFill>
                 <a:latin typeface="Lexend"/>
               </a:rPr>
-              <a:t>A tablet screen is 6 in wide and 8 in tall.</a:t>
+              <a:t>A tablet screen is 6 inches wide and 8 inches tall.</a:t>
             </a:r>
           </a:p>
         </p:txBody>
@@ -7259,7 +7259,7 @@
         <p:spPr>
           <a:xfrm>
             <a:off x="1874519" y="2665476"/>
-            <a:ext cx="8941184" cy="457200"/>
+            <a:ext cx="9586773" cy="457200"/>
           </a:xfrm>
           <a:prstGeom prst="rect">
             <a:avLst/>
@@ -7280,7 +7280,7 @@
                 </a:solidFill>
                 <a:latin typeface="Lexend"/>
               </a:rPr>
-              <a:t>3.   A plan's scale is 1 in : 4 ft. A wall is 3.5 in on it. Real length?</a:t>
+              <a:t>3.   A plan's scale is 1 in : 4 ft. A wall is 3.5 inches on it. Real length?</a:t>
             </a:r>
           </a:p>
         </p:txBody>
@@ -7578,7 +7578,7 @@
                 </a:solidFill>
                 <a:latin typeface="Lexend"/>
               </a:rPr>
-              <a:t>A ramp rises 1 ft over a run of 12 ft.</a:t>
+              <a:t>A ramp rises 4 ft over a run of 11 ft.</a:t>
             </a:r>
           </a:p>
         </p:txBody>
@@ -7620,7 +7620,7 @@
       </p:sp>
       <p:pic>
         <p:nvPicPr>
-          <p:cNvPr id="10" name="Picture 9" descr="g1aa89cbdcacb1a75.png"/>
+          <p:cNvPr id="10" name="Picture 9" descr="g2742e16789d1b8f4.png"/>
           <p:cNvPicPr>
             <a:picLocks noChangeAspect="1"/>
           </p:cNvPicPr>
@@ -7634,8 +7634,8 @@
         </p:blipFill>
         <p:spPr>
           <a:xfrm>
-            <a:off x="3794759" y="2998436"/>
-            <a:ext cx="4572000" cy="866273"/>
+            <a:off x="4146803" y="2998436"/>
+            <a:ext cx="3867912" cy="1644880"/>
           </a:xfrm>
           <a:prstGeom prst="rect">
             <a:avLst/>
@@ -7650,7 +7650,7 @@
         </p:nvSpPr>
         <p:spPr>
           <a:xfrm>
-            <a:off x="777240" y="4343400"/>
+            <a:off x="777240" y="4926781"/>
             <a:ext cx="10607040" cy="457200"/>
           </a:xfrm>
           <a:prstGeom prst="rect">
@@ -7935,7 +7935,7 @@
                 </a:solidFill>
                 <a:latin typeface="Lexend"/>
               </a:rPr>
-              <a:t>A ramp rises 1 ft over a run of 12 ft.</a:t>
+              <a:t>A ramp rises 4 ft over a run of 11 ft.</a:t>
             </a:r>
           </a:p>
         </p:txBody>
@@ -7977,7 +7977,7 @@
       </p:sp>
       <p:pic>
         <p:nvPicPr>
-          <p:cNvPr id="10" name="Picture 9" descr="g1aa89cbdcacb1a75.png"/>
+          <p:cNvPr id="10" name="Picture 9" descr="g2742e16789d1b8f4.png"/>
           <p:cNvPicPr>
             <a:picLocks noChangeAspect="1"/>
           </p:cNvPicPr>
@@ -7991,8 +7991,8 @@
         </p:blipFill>
         <p:spPr>
           <a:xfrm>
-            <a:off x="2296667" y="3022500"/>
-            <a:ext cx="4572000" cy="866273"/>
+            <a:off x="2609087" y="2998436"/>
+            <a:ext cx="3867912" cy="1644880"/>
           </a:xfrm>
           <a:prstGeom prst="rect">
             <a:avLst/>
@@ -8001,7 +8001,7 @@
       </p:pic>
       <p:pic>
         <p:nvPicPr>
-          <p:cNvPr id="11" name="Picture 10" descr="a20c40ab101424be.png"/>
+          <p:cNvPr id="11" name="Picture 10" descr="a67103b6e306ec83.png"/>
           <p:cNvPicPr>
             <a:picLocks noChangeAspect="1"/>
           </p:cNvPicPr>
@@ -8015,8 +8015,8 @@
         </p:blipFill>
         <p:spPr>
           <a:xfrm>
-            <a:off x="7655052" y="3061778"/>
-            <a:ext cx="2264664" cy="262128"/>
+            <a:off x="7263384" y="3427018"/>
+            <a:ext cx="2346960" cy="262128"/>
           </a:xfrm>
           <a:prstGeom prst="rect">
             <a:avLst/>
@@ -8025,7 +8025,7 @@
       </p:pic>
       <p:pic>
         <p:nvPicPr>
-          <p:cNvPr id="12" name="Picture 11" descr="f911e00157d38567.png"/>
+          <p:cNvPr id="12" name="Picture 11" descr="c7a7f848c47d41a1.png"/>
           <p:cNvPicPr>
             <a:picLocks noChangeAspect="1"/>
           </p:cNvPicPr>
@@ -8039,8 +8039,8 @@
         </p:blipFill>
         <p:spPr>
           <a:xfrm>
-            <a:off x="7655052" y="3534218"/>
-            <a:ext cx="2090928" cy="368808"/>
+            <a:off x="7263384" y="3899458"/>
+            <a:ext cx="2026920" cy="368808"/>
           </a:xfrm>
           <a:prstGeom prst="rect">
             <a:avLst/>
@@ -8055,7 +8055,7 @@
         </p:nvSpPr>
         <p:spPr>
           <a:xfrm>
-            <a:off x="777240" y="4663440"/>
+            <a:off x="777240" y="4926781"/>
             <a:ext cx="10607040" cy="548640"/>
           </a:xfrm>
           <a:prstGeom prst="rect">
@@ -8077,7 +8077,7 @@
                 </a:solidFill>
                 <a:latin typeface="Lexend"/>
               </a:rPr>
-              <a:t>Answer:   About 12.0 ft</a:t>
+              <a:t>Answer:   About 11.7 ft</a:t>
             </a:r>
           </a:p>
         </p:txBody>
@@ -8340,7 +8340,7 @@
                 </a:solidFill>
                 <a:latin typeface="Lexend"/>
               </a:rPr>
-              <a:t>A 17-ft ladder reaches 15 ft up a wall.</a:t>
+              <a:t>A 20-ft ladder reaches 16 ft up a wall.</a:t>
             </a:r>
           </a:p>
         </p:txBody>
@@ -8419,7 +8419,7 @@
                 </a:solidFill>
                 <a:latin typeface="Lexend"/>
               </a:rPr>
-              <a:t>8 ft</a:t>
+              <a:t>12 ft</a:t>
             </a:r>
           </a:p>
         </p:txBody>
@@ -8463,7 +8463,7 @@
                 </a:solidFill>
                 <a:latin typeface="Lexend"/>
               </a:rPr>
-              <a:t>22.7 ft</a:t>
+              <a:t>25.6 ft</a:t>
             </a:r>
           </a:p>
         </p:txBody>
@@ -8507,7 +8507,7 @@
                 </a:solidFill>
                 <a:latin typeface="Lexend"/>
               </a:rPr>
-              <a:t>2 ft</a:t>
+              <a:t>4 ft</a:t>
             </a:r>
           </a:p>
         </p:txBody>
@@ -8551,7 +8551,7 @@
                 </a:solidFill>
                 <a:latin typeface="Lexend"/>
               </a:rPr>
-              <a:t>64 ft</a:t>
+              <a:t>144 ft</a:t>
             </a:r>
           </a:p>
         </p:txBody>
@@ -8849,7 +8849,7 @@
                 </a:solidFill>
                 <a:latin typeface="Lexend"/>
               </a:rPr>
-              <a:t>A 17-ft ladder reaches 15 ft up a wall.</a:t>
+              <a:t>A 20-ft ladder reaches 16 ft up a wall.</a:t>
             </a:r>
           </a:p>
         </p:txBody>
@@ -8891,7 +8891,7 @@
       </p:sp>
       <p:pic>
         <p:nvPicPr>
-          <p:cNvPr id="10" name="Picture 9" descr="96b72744754d2b16.png"/>
+          <p:cNvPr id="10" name="Picture 9" descr="e53afea40bf0010e.png"/>
           <p:cNvPicPr>
             <a:picLocks noChangeAspect="1"/>
           </p:cNvPicPr>
@@ -8905,8 +8905,8 @@
         </p:blipFill>
         <p:spPr>
           <a:xfrm>
-            <a:off x="4675631" y="3116737"/>
-            <a:ext cx="2923032" cy="304800"/>
+            <a:off x="4547615" y="3116737"/>
+            <a:ext cx="3176016" cy="304800"/>
           </a:xfrm>
           <a:prstGeom prst="rect">
             <a:avLst/>
@@ -8915,7 +8915,7 @@
       </p:pic>
       <p:pic>
         <p:nvPicPr>
-          <p:cNvPr id="11" name="Picture 10" descr="f51d5964525f8a24.png"/>
+          <p:cNvPr id="11" name="Picture 10" descr="439b221365061236.png"/>
           <p:cNvPicPr>
             <a:picLocks noChangeAspect="1"/>
           </p:cNvPicPr>
@@ -8929,8 +8929,8 @@
         </p:blipFill>
         <p:spPr>
           <a:xfrm>
-            <a:off x="4675631" y="3611084"/>
-            <a:ext cx="1871472" cy="432816"/>
+            <a:off x="4547615" y="3611084"/>
+            <a:ext cx="2243328" cy="432816"/>
           </a:xfrm>
           <a:prstGeom prst="rect">
             <a:avLst/>
@@ -8967,7 +8967,7 @@
                 </a:solidFill>
                 <a:latin typeface="Lexend"/>
               </a:rPr>
-              <a:t>Answer:   A — 8 ft</a:t>
+              <a:t>Answer:   A — 12 ft</a:t>
             </a:r>
           </a:p>
         </p:txBody>
@@ -9643,7 +9643,7 @@
         </p:blipFill>
         <p:spPr>
           <a:xfrm>
-            <a:off x="2820613" y="3427807"/>
+            <a:off x="2471867" y="3427807"/>
             <a:ext cx="2468880" cy="1800224"/>
           </a:xfrm>
           <a:prstGeom prst="rect">
@@ -9659,8 +9659,8 @@
         </p:nvSpPr>
         <p:spPr>
           <a:xfrm>
-            <a:off x="6021013" y="3596399"/>
-            <a:ext cx="1563237" cy="457200"/>
+            <a:off x="5672267" y="3596399"/>
+            <a:ext cx="2838380" cy="457200"/>
           </a:xfrm>
           <a:prstGeom prst="rect">
             <a:avLst/>
@@ -9681,7 +9681,7 @@
                 </a:solidFill>
                 <a:latin typeface="Lexend"/>
               </a:rPr>
-              <a:t>Around:  </a:t>
+              <a:t>Along two sides:  </a:t>
             </a:r>
           </a:p>
         </p:txBody>
@@ -9702,7 +9702,7 @@
         </p:blipFill>
         <p:spPr>
           <a:xfrm>
-            <a:off x="7447091" y="3729321"/>
+            <a:off x="8373488" y="3729321"/>
             <a:ext cx="1318498" cy="212359"/>
           </a:xfrm>
           <a:prstGeom prst="rect">
@@ -9718,7 +9718,7 @@
         </p:nvSpPr>
         <p:spPr>
           <a:xfrm>
-            <a:off x="6021013" y="4099319"/>
+            <a:off x="5672267" y="4099319"/>
             <a:ext cx="1450135" cy="457200"/>
           </a:xfrm>
           <a:prstGeom prst="rect">
@@ -9761,7 +9761,7 @@
         </p:blipFill>
         <p:spPr>
           <a:xfrm>
-            <a:off x="7333989" y="4155231"/>
+            <a:off x="6985243" y="4155231"/>
             <a:ext cx="2009251" cy="366379"/>
           </a:xfrm>
           <a:prstGeom prst="rect">
@@ -9785,7 +9785,7 @@
         </p:blipFill>
         <p:spPr>
           <a:xfrm>
-            <a:off x="6075877" y="4737209"/>
+            <a:off x="5727131" y="4737209"/>
             <a:ext cx="1325880" cy="213360"/>
           </a:xfrm>
           <a:prstGeom prst="rect">
@@ -10998,7 +10998,7 @@
                 </a:solidFill>
                 <a:latin typeface="Lexend"/>
               </a:rPr>
-              <a:t>A box is 7 in wide and 12 in long.</a:t>
+              <a:t>A box is 7 inches wide and 12 inches long.</a:t>
             </a:r>
           </a:p>
         </p:txBody>
@@ -11040,7 +11040,7 @@
       </p:sp>
       <p:pic>
         <p:nvPicPr>
-          <p:cNvPr id="10" name="Picture 9" descr="gb0f4a1f68e14bab5.png"/>
+          <p:cNvPr id="10" name="Picture 9" descr="g3d0437d6ec0aa9e8.png"/>
           <p:cNvPicPr>
             <a:picLocks noChangeAspect="1"/>
           </p:cNvPicPr>
@@ -11054,8 +11054,8 @@
         </p:blipFill>
         <p:spPr>
           <a:xfrm>
-            <a:off x="4425696" y="2998436"/>
-            <a:ext cx="3310128" cy="2004757"/>
+            <a:off x="4892040" y="2998436"/>
+            <a:ext cx="2377440" cy="2008812"/>
           </a:xfrm>
           <a:prstGeom prst="rect">
             <a:avLst/>
@@ -11070,7 +11070,7 @@
         </p:nvSpPr>
         <p:spPr>
           <a:xfrm>
-            <a:off x="777240" y="5286658"/>
+            <a:off x="777240" y="5290713"/>
             <a:ext cx="10607040" cy="457200"/>
           </a:xfrm>
           <a:prstGeom prst="rect">
@@ -11355,7 +11355,7 @@
                 </a:solidFill>
                 <a:latin typeface="Lexend"/>
               </a:rPr>
-              <a:t>A box is 7 in wide and 12 in long.</a:t>
+              <a:t>A box is 7 inches wide and 12 inches long.</a:t>
             </a:r>
           </a:p>
         </p:txBody>
@@ -11397,7 +11397,7 @@
       </p:sp>
       <p:pic>
         <p:nvPicPr>
-          <p:cNvPr id="10" name="Picture 9" descr="gb0f4a1f68e14bab5.png"/>
+          <p:cNvPr id="10" name="Picture 9" descr="g3d0437d6ec0aa9e8.png"/>
           <p:cNvPicPr>
             <a:picLocks noChangeAspect="1"/>
           </p:cNvPicPr>
@@ -11411,8 +11411,8 @@
         </p:blipFill>
         <p:spPr>
           <a:xfrm>
-            <a:off x="2842259" y="2998436"/>
-            <a:ext cx="3310128" cy="2004757"/>
+            <a:off x="3308603" y="2998436"/>
+            <a:ext cx="2377440" cy="2008812"/>
           </a:xfrm>
           <a:prstGeom prst="rect">
             <a:avLst/>
@@ -11435,7 +11435,7 @@
         </p:blipFill>
         <p:spPr>
           <a:xfrm>
-            <a:off x="6938772" y="3606956"/>
+            <a:off x="6472427" y="3608984"/>
             <a:ext cx="2438400" cy="262128"/>
           </a:xfrm>
           <a:prstGeom prst="rect">
@@ -11459,7 +11459,7 @@
         </p:blipFill>
         <p:spPr>
           <a:xfrm>
-            <a:off x="6938772" y="4079396"/>
+            <a:off x="6472427" y="4081424"/>
             <a:ext cx="2039112" cy="368808"/>
           </a:xfrm>
           <a:prstGeom prst="rect">
@@ -11475,7 +11475,7 @@
         </p:nvSpPr>
         <p:spPr>
           <a:xfrm>
-            <a:off x="777240" y="5286658"/>
+            <a:off x="777240" y="5290713"/>
             <a:ext cx="10607040" cy="548640"/>
           </a:xfrm>
           <a:prstGeom prst="rect">
@@ -11888,7 +11888,7 @@
         <p:spPr>
           <a:xfrm>
             <a:off x="1874519" y="3579876"/>
-            <a:ext cx="8941184" cy="457200"/>
+            <a:ext cx="9586773" cy="457200"/>
           </a:xfrm>
           <a:prstGeom prst="rect">
             <a:avLst/>
@@ -11909,7 +11909,7 @@
                 </a:solidFill>
                 <a:latin typeface="Lexend"/>
               </a:rPr>
-              <a:t>3.   A plan's scale is 1 in : 4 ft. A wall is 3.5 in on it. Real length?</a:t>
+              <a:t>3.   A plan's scale is 1 in : 4 ft. A wall is 3.5 inches on it. Real length?</a:t>
             </a:r>
           </a:p>
         </p:txBody>
@@ -13721,7 +13721,7 @@
           <a:p>
             <a:pPr algn="l"/>
             <a:r>
-              <a:rPr sz="1810" b="1" i="0">
+              <a:rPr sz="1710" b="1" i="0">
                 <a:solidFill>
                   <a:srgbClr val="0B5394"/>
                 </a:solidFill>
@@ -13756,13 +13756,13 @@
           <a:p>
             <a:pPr algn="l"/>
             <a:r>
-              <a:rPr sz="1810" b="0" i="0">
+              <a:rPr sz="1710" b="0" i="0">
                 <a:solidFill>
                   <a:srgbClr val="1A1A1A"/>
                 </a:solidFill>
                 <a:latin typeface="Lexend"/>
               </a:rPr>
-              <a:t>A tablet screen is 5 in wide and 8 in tall. How long is its diagonal, to the nearest tenth of an inch?</a:t>
+              <a:t>A tablet screen is 5 inches wide and 8 inches tall. How long is its diagonal, to the nearest tenth of an inch?</a:t>
             </a:r>
           </a:p>
         </p:txBody>
@@ -13775,7 +13775,7 @@
         </p:nvSpPr>
         <p:spPr>
           <a:xfrm>
-            <a:off x="960120" y="2432304"/>
+            <a:off x="960120" y="2414016"/>
             <a:ext cx="548640" cy="356616"/>
           </a:xfrm>
           <a:prstGeom prst="rect">
@@ -13791,7 +13791,7 @@
           <a:p>
             <a:pPr algn="l"/>
             <a:r>
-              <a:rPr sz="1810" b="1" i="0">
+              <a:rPr sz="1710" b="1" i="0">
                 <a:solidFill>
                   <a:srgbClr val="0B5394"/>
                 </a:solidFill>
@@ -13810,7 +13810,217 @@
         </p:nvSpPr>
         <p:spPr>
           <a:xfrm>
-            <a:off x="1554480" y="2432304"/>
+            <a:off x="1554480" y="2414016"/>
+            <a:ext cx="9829800" cy="768096"/>
+          </a:xfrm>
+          <a:prstGeom prst="rect">
+            <a:avLst/>
+          </a:prstGeom>
+          <a:noFill/>
+        </p:spPr>
+        <p:txBody>
+          <a:bodyPr wrap="square" lIns="45720" rIns="45720" tIns="18288" bIns="18288" anchor="t">
+            <a:spAutoFit/>
+          </a:bodyPr>
+          <a:lstStyle/>
+          <a:p>
+            <a:pPr algn="l"/>
+            <a:r>
+              <a:rPr sz="1710" b="0" i="0">
+                <a:solidFill>
+                  <a:srgbClr val="1A1A1A"/>
+                </a:solidFill>
+                <a:latin typeface="Lexend"/>
+              </a:rPr>
+              <a:t>A fire truck's 50-ft ladder reaches 48 ft up a building. How far from the building is its foot?</a:t>
+            </a:r>
+          </a:p>
+        </p:txBody>
+      </p:sp>
+      <p:sp>
+        <p:nvSpPr>
+          <p:cNvPr id="12" name="TextBox 11"/>
+          <p:cNvSpPr txBox="1"/>
+          <p:nvPr/>
+        </p:nvSpPr>
+        <p:spPr>
+          <a:xfrm>
+            <a:off x="960120" y="3255264"/>
+            <a:ext cx="548640" cy="356616"/>
+          </a:xfrm>
+          <a:prstGeom prst="rect">
+            <a:avLst/>
+          </a:prstGeom>
+          <a:noFill/>
+        </p:spPr>
+        <p:txBody>
+          <a:bodyPr wrap="square" lIns="45720" rIns="45720" tIns="18288" bIns="18288" anchor="t">
+            <a:spAutoFit/>
+          </a:bodyPr>
+          <a:lstStyle/>
+          <a:p>
+            <a:pPr algn="l"/>
+            <a:r>
+              <a:rPr sz="1710" b="1" i="0">
+                <a:solidFill>
+                  <a:srgbClr val="0B5394"/>
+                </a:solidFill>
+                <a:latin typeface="Lexend"/>
+              </a:rPr>
+              <a:t>3.</a:t>
+            </a:r>
+          </a:p>
+        </p:txBody>
+      </p:sp>
+      <p:sp>
+        <p:nvSpPr>
+          <p:cNvPr id="13" name="TextBox 12"/>
+          <p:cNvSpPr txBox="1"/>
+          <p:nvPr/>
+        </p:nvSpPr>
+        <p:spPr>
+          <a:xfrm>
+            <a:off x="1554480" y="3255264"/>
+            <a:ext cx="9829800" cy="768096"/>
+          </a:xfrm>
+          <a:prstGeom prst="rect">
+            <a:avLst/>
+          </a:prstGeom>
+          <a:noFill/>
+        </p:spPr>
+        <p:txBody>
+          <a:bodyPr wrap="square" lIns="45720" rIns="45720" tIns="18288" bIns="18288" anchor="t">
+            <a:spAutoFit/>
+          </a:bodyPr>
+          <a:lstStyle/>
+          <a:p>
+            <a:pPr algn="l"/>
+            <a:r>
+              <a:rPr sz="1710" b="0" i="0">
+                <a:solidFill>
+                  <a:srgbClr val="1A1A1A"/>
+                </a:solidFill>
+                <a:latin typeface="Lexend"/>
+              </a:rPr>
+              <a:t>A ramp rises 3 ft over a run of 14 ft. How long is the ramp, to the nearest tenth of a foot?</a:t>
+            </a:r>
+          </a:p>
+        </p:txBody>
+      </p:sp>
+      <p:sp>
+        <p:nvSpPr>
+          <p:cNvPr id="14" name="TextBox 13"/>
+          <p:cNvSpPr txBox="1"/>
+          <p:nvPr/>
+        </p:nvSpPr>
+        <p:spPr>
+          <a:xfrm>
+            <a:off x="960120" y="4096512"/>
+            <a:ext cx="548640" cy="356616"/>
+          </a:xfrm>
+          <a:prstGeom prst="rect">
+            <a:avLst/>
+          </a:prstGeom>
+          <a:noFill/>
+        </p:spPr>
+        <p:txBody>
+          <a:bodyPr wrap="square" lIns="45720" rIns="45720" tIns="18288" bIns="18288" anchor="t">
+            <a:spAutoFit/>
+          </a:bodyPr>
+          <a:lstStyle/>
+          <a:p>
+            <a:pPr algn="l"/>
+            <a:r>
+              <a:rPr sz="1710" b="1" i="0">
+                <a:solidFill>
+                  <a:srgbClr val="0B5394"/>
+                </a:solidFill>
+                <a:latin typeface="Lexend"/>
+              </a:rPr>
+              <a:t>4.</a:t>
+            </a:r>
+          </a:p>
+        </p:txBody>
+      </p:sp>
+      <p:sp>
+        <p:nvSpPr>
+          <p:cNvPr id="15" name="TextBox 14"/>
+          <p:cNvSpPr txBox="1"/>
+          <p:nvPr/>
+        </p:nvSpPr>
+        <p:spPr>
+          <a:xfrm>
+            <a:off x="1554480" y="4096512"/>
+            <a:ext cx="9829800" cy="768096"/>
+          </a:xfrm>
+          <a:prstGeom prst="rect">
+            <a:avLst/>
+          </a:prstGeom>
+          <a:noFill/>
+        </p:spPr>
+        <p:txBody>
+          <a:bodyPr wrap="square" lIns="45720" rIns="45720" tIns="18288" bIns="18288" anchor="t">
+            <a:spAutoFit/>
+          </a:bodyPr>
+          <a:lstStyle/>
+          <a:p>
+            <a:pPr algn="l"/>
+            <a:r>
+              <a:rPr sz="1710" b="0" i="0">
+                <a:solidFill>
+                  <a:srgbClr val="1A1A1A"/>
+                </a:solidFill>
+                <a:latin typeface="Lexend"/>
+              </a:rPr>
+              <a:t>A park is 7 m by 11 m. How much shorter is the walk straight across, corner to corner, than the walk along two sides? Give it to the nearest tenth of a meter.</a:t>
+            </a:r>
+          </a:p>
+        </p:txBody>
+      </p:sp>
+      <p:sp>
+        <p:nvSpPr>
+          <p:cNvPr id="16" name="TextBox 15"/>
+          <p:cNvSpPr txBox="1"/>
+          <p:nvPr/>
+        </p:nvSpPr>
+        <p:spPr>
+          <a:xfrm>
+            <a:off x="960120" y="4937760"/>
+            <a:ext cx="548640" cy="356616"/>
+          </a:xfrm>
+          <a:prstGeom prst="rect">
+            <a:avLst/>
+          </a:prstGeom>
+          <a:noFill/>
+        </p:spPr>
+        <p:txBody>
+          <a:bodyPr wrap="square" lIns="45720" rIns="45720" tIns="18288" bIns="18288" anchor="t">
+            <a:spAutoFit/>
+          </a:bodyPr>
+          <a:lstStyle/>
+          <a:p>
+            <a:pPr algn="l"/>
+            <a:r>
+              <a:rPr sz="1710" b="1" i="0">
+                <a:solidFill>
+                  <a:srgbClr val="0B5394"/>
+                </a:solidFill>
+                <a:latin typeface="Lexend"/>
+              </a:rPr>
+              <a:t>5.</a:t>
+            </a:r>
+          </a:p>
+        </p:txBody>
+      </p:sp>
+      <p:sp>
+        <p:nvSpPr>
+          <p:cNvPr id="17" name="TextBox 16"/>
+          <p:cNvSpPr txBox="1"/>
+          <p:nvPr/>
+        </p:nvSpPr>
+        <p:spPr>
+          <a:xfrm>
+            <a:off x="1554480" y="4937760"/>
             <a:ext cx="9829800" cy="411480"/>
           </a:xfrm>
           <a:prstGeom prst="rect">
@@ -13826,26 +14036,26 @@
           <a:p>
             <a:pPr algn="l"/>
             <a:r>
-              <a:rPr sz="1810" b="0" i="0">
+              <a:rPr sz="1710" b="0" i="0">
                 <a:solidFill>
                   <a:srgbClr val="1A1A1A"/>
                 </a:solidFill>
                 <a:latin typeface="Lexend"/>
               </a:rPr>
-              <a:t>A 26-ft ladder reaches 24 ft up a wall. How far from the wall is its foot?</a:t>
-            </a:r>
-          </a:p>
-        </p:txBody>
-      </p:sp>
-      <p:sp>
-        <p:nvSpPr>
-          <p:cNvPr id="12" name="TextBox 11"/>
-          <p:cNvSpPr txBox="1"/>
-          <p:nvPr/>
-        </p:nvSpPr>
-        <p:spPr>
-          <a:xfrm>
-            <a:off x="960120" y="2935224"/>
+              <a:t>Will a 10-in pencil lie flat in a box 7 inches by 8 inches, corner to corner?</a:t>
+            </a:r>
+          </a:p>
+        </p:txBody>
+      </p:sp>
+      <p:sp>
+        <p:nvSpPr>
+          <p:cNvPr id="18" name="TextBox 17"/>
+          <p:cNvSpPr txBox="1"/>
+          <p:nvPr/>
+        </p:nvSpPr>
+        <p:spPr>
+          <a:xfrm>
+            <a:off x="960120" y="5422392"/>
             <a:ext cx="548640" cy="356616"/>
           </a:xfrm>
           <a:prstGeom prst="rect">
@@ -13861,26 +14071,26 @@
           <a:p>
             <a:pPr algn="l"/>
             <a:r>
-              <a:rPr sz="1810" b="1" i="0">
+              <a:rPr sz="1710" b="1" i="0">
                 <a:solidFill>
                   <a:srgbClr val="0B5394"/>
                 </a:solidFill>
                 <a:latin typeface="Lexend"/>
               </a:rPr>
-              <a:t>3.</a:t>
-            </a:r>
-          </a:p>
-        </p:txBody>
-      </p:sp>
-      <p:sp>
-        <p:nvSpPr>
-          <p:cNvPr id="13" name="TextBox 12"/>
-          <p:cNvSpPr txBox="1"/>
-          <p:nvPr/>
-        </p:nvSpPr>
-        <p:spPr>
-          <a:xfrm>
-            <a:off x="1554480" y="2935224"/>
+              <a:t>6.</a:t>
+            </a:r>
+          </a:p>
+        </p:txBody>
+      </p:sp>
+      <p:sp>
+        <p:nvSpPr>
+          <p:cNvPr id="19" name="TextBox 18"/>
+          <p:cNvSpPr txBox="1"/>
+          <p:nvPr/>
+        </p:nvSpPr>
+        <p:spPr>
+          <a:xfrm>
+            <a:off x="1554480" y="5422392"/>
             <a:ext cx="9829800" cy="768096"/>
           </a:xfrm>
           <a:prstGeom prst="rect">
@@ -13896,217 +14106,7 @@
           <a:p>
             <a:pPr algn="l"/>
             <a:r>
-              <a:rPr sz="1810" b="0" i="0">
-                <a:solidFill>
-                  <a:srgbClr val="1A1A1A"/>
-                </a:solidFill>
-                <a:latin typeface="Lexend"/>
-              </a:rPr>
-              <a:t>A ramp rises 3 ft over a run of 14 ft. How long is the ramp, to the nearest tenth of a foot?</a:t>
-            </a:r>
-          </a:p>
-        </p:txBody>
-      </p:sp>
-      <p:sp>
-        <p:nvSpPr>
-          <p:cNvPr id="14" name="TextBox 13"/>
-          <p:cNvSpPr txBox="1"/>
-          <p:nvPr/>
-        </p:nvSpPr>
-        <p:spPr>
-          <a:xfrm>
-            <a:off x="960120" y="3794760"/>
-            <a:ext cx="548640" cy="356616"/>
-          </a:xfrm>
-          <a:prstGeom prst="rect">
-            <a:avLst/>
-          </a:prstGeom>
-          <a:noFill/>
-        </p:spPr>
-        <p:txBody>
-          <a:bodyPr wrap="square" lIns="45720" rIns="45720" tIns="18288" bIns="18288" anchor="t">
-            <a:spAutoFit/>
-          </a:bodyPr>
-          <a:lstStyle/>
-          <a:p>
-            <a:pPr algn="l"/>
-            <a:r>
-              <a:rPr sz="1810" b="1" i="0">
-                <a:solidFill>
-                  <a:srgbClr val="0B5394"/>
-                </a:solidFill>
-                <a:latin typeface="Lexend"/>
-              </a:rPr>
-              <a:t>4.</a:t>
-            </a:r>
-          </a:p>
-        </p:txBody>
-      </p:sp>
-      <p:sp>
-        <p:nvSpPr>
-          <p:cNvPr id="15" name="TextBox 14"/>
-          <p:cNvSpPr txBox="1"/>
-          <p:nvPr/>
-        </p:nvSpPr>
-        <p:spPr>
-          <a:xfrm>
-            <a:off x="1554480" y="3794760"/>
-            <a:ext cx="9829800" cy="768096"/>
-          </a:xfrm>
-          <a:prstGeom prst="rect">
-            <a:avLst/>
-          </a:prstGeom>
-          <a:noFill/>
-        </p:spPr>
-        <p:txBody>
-          <a:bodyPr wrap="square" lIns="45720" rIns="45720" tIns="18288" bIns="18288" anchor="t">
-            <a:spAutoFit/>
-          </a:bodyPr>
-          <a:lstStyle/>
-          <a:p>
-            <a:pPr algn="l"/>
-            <a:r>
-              <a:rPr sz="1810" b="0" i="0">
-                <a:solidFill>
-                  <a:srgbClr val="1A1A1A"/>
-                </a:solidFill>
-                <a:latin typeface="Lexend"/>
-              </a:rPr>
-              <a:t>A park is 7 m by 11 m. How much shorter is the walk straight across, corner to corner, than the walk along two sides? Give it to the nearest tenth of a meter.</a:t>
-            </a:r>
-          </a:p>
-        </p:txBody>
-      </p:sp>
-      <p:sp>
-        <p:nvSpPr>
-          <p:cNvPr id="16" name="TextBox 15"/>
-          <p:cNvSpPr txBox="1"/>
-          <p:nvPr/>
-        </p:nvSpPr>
-        <p:spPr>
-          <a:xfrm>
-            <a:off x="960120" y="4654296"/>
-            <a:ext cx="548640" cy="356616"/>
-          </a:xfrm>
-          <a:prstGeom prst="rect">
-            <a:avLst/>
-          </a:prstGeom>
-          <a:noFill/>
-        </p:spPr>
-        <p:txBody>
-          <a:bodyPr wrap="square" lIns="45720" rIns="45720" tIns="18288" bIns="18288" anchor="t">
-            <a:spAutoFit/>
-          </a:bodyPr>
-          <a:lstStyle/>
-          <a:p>
-            <a:pPr algn="l"/>
-            <a:r>
-              <a:rPr sz="1810" b="1" i="0">
-                <a:solidFill>
-                  <a:srgbClr val="0B5394"/>
-                </a:solidFill>
-                <a:latin typeface="Lexend"/>
-              </a:rPr>
-              <a:t>5.</a:t>
-            </a:r>
-          </a:p>
-        </p:txBody>
-      </p:sp>
-      <p:sp>
-        <p:nvSpPr>
-          <p:cNvPr id="17" name="TextBox 16"/>
-          <p:cNvSpPr txBox="1"/>
-          <p:nvPr/>
-        </p:nvSpPr>
-        <p:spPr>
-          <a:xfrm>
-            <a:off x="1554480" y="4654296"/>
-            <a:ext cx="9829800" cy="411480"/>
-          </a:xfrm>
-          <a:prstGeom prst="rect">
-            <a:avLst/>
-          </a:prstGeom>
-          <a:noFill/>
-        </p:spPr>
-        <p:txBody>
-          <a:bodyPr wrap="square" lIns="45720" rIns="45720" tIns="18288" bIns="18288" anchor="t">
-            <a:spAutoFit/>
-          </a:bodyPr>
-          <a:lstStyle/>
-          <a:p>
-            <a:pPr algn="l"/>
-            <a:r>
-              <a:rPr sz="1810" b="0" i="0">
-                <a:solidFill>
-                  <a:srgbClr val="1A1A1A"/>
-                </a:solidFill>
-                <a:latin typeface="Lexend"/>
-              </a:rPr>
-              <a:t>Will a 10-in pencil lie flat in a box 7 in by 8 in, corner to corner?</a:t>
-            </a:r>
-          </a:p>
-        </p:txBody>
-      </p:sp>
-      <p:sp>
-        <p:nvSpPr>
-          <p:cNvPr id="18" name="TextBox 17"/>
-          <p:cNvSpPr txBox="1"/>
-          <p:nvPr/>
-        </p:nvSpPr>
-        <p:spPr>
-          <a:xfrm>
-            <a:off x="960120" y="5157216"/>
-            <a:ext cx="548640" cy="356616"/>
-          </a:xfrm>
-          <a:prstGeom prst="rect">
-            <a:avLst/>
-          </a:prstGeom>
-          <a:noFill/>
-        </p:spPr>
-        <p:txBody>
-          <a:bodyPr wrap="square" lIns="45720" rIns="45720" tIns="18288" bIns="18288" anchor="t">
-            <a:spAutoFit/>
-          </a:bodyPr>
-          <a:lstStyle/>
-          <a:p>
-            <a:pPr algn="l"/>
-            <a:r>
-              <a:rPr sz="1810" b="1" i="0">
-                <a:solidFill>
-                  <a:srgbClr val="0B5394"/>
-                </a:solidFill>
-                <a:latin typeface="Lexend"/>
-              </a:rPr>
-              <a:t>6.</a:t>
-            </a:r>
-          </a:p>
-        </p:txBody>
-      </p:sp>
-      <p:sp>
-        <p:nvSpPr>
-          <p:cNvPr id="19" name="TextBox 18"/>
-          <p:cNvSpPr txBox="1"/>
-          <p:nvPr/>
-        </p:nvSpPr>
-        <p:spPr>
-          <a:xfrm>
-            <a:off x="1554480" y="5157216"/>
-            <a:ext cx="9829800" cy="768096"/>
-          </a:xfrm>
-          <a:prstGeom prst="rect">
-            <a:avLst/>
-          </a:prstGeom>
-          <a:noFill/>
-        </p:spPr>
-        <p:txBody>
-          <a:bodyPr wrap="square" lIns="45720" rIns="45720" tIns="18288" bIns="18288" anchor="t">
-            <a:spAutoFit/>
-          </a:bodyPr>
-          <a:lstStyle/>
-          <a:p>
-            <a:pPr algn="l"/>
-            <a:r>
-              <a:rPr sz="1810" b="0" i="0">
+              <a:rPr sz="1710" b="0" i="0">
                 <a:solidFill>
                   <a:srgbClr val="1A1A1A"/>
                 </a:solidFill>
@@ -15785,7 +15785,7 @@
                 </a:solidFill>
                 <a:latin typeface="Lexend"/>
               </a:rPr>
-              <a:t>The path is 13 m.</a:t>
+              <a:t>The path is 13 m. Along two sides is 17 m: the path is 4 m shorter.</a:t>
             </a:r>
           </a:p>
         </p:txBody>

--- a/a7/build/out/u6/A7 6.04 Pythagorean Theorem in Real-World Problems - Slides.pptx
+++ b/a7/build/out/u6/A7 6.04 Pythagorean Theorem in Real-World Problems - Slides.pptx
@@ -14550,7 +14550,7 @@
                 </a:solidFill>
                 <a:latin typeface="Lexend"/>
               </a:rPr>
-              <a:t>Every skill listed is required, to a SmartScore of 67. Due at the start of the next class.</a:t>
+              <a:t>Every skill listed is required, to a SmartScore of 67. Due by the Unit 6 test.</a:t>
             </a:r>
           </a:p>
         </p:txBody>

--- a/a7/build/out/u6/A7 6.04 Pythagorean Theorem in Real-World Problems - Slides.pptx
+++ b/a7/build/out/u6/A7 6.04 Pythagorean Theorem in Real-World Problems - Slides.pptx
@@ -4381,7 +4381,7 @@
       </p:sp>
       <p:pic>
         <p:nvPicPr>
-          <p:cNvPr id="9" name="Picture 8" descr="g8e7e96d88d09886e.png"/>
+          <p:cNvPr id="9" name="Picture 8" descr="gdf66deaff3ad1222.png"/>
           <p:cNvPicPr>
             <a:picLocks noChangeAspect="1"/>
           </p:cNvPicPr>
@@ -5686,7 +5686,7 @@
                 </a:solidFill>
                 <a:latin typeface="Lexend"/>
               </a:rPr>
-              <a:t>A tablet screen is 6 inches wide and 8 inches tall.</a:t>
+              <a:t>A swimming pool is 12 m long and 5 m wide.</a:t>
             </a:r>
           </a:p>
         </p:txBody>
@@ -5728,7 +5728,7 @@
       </p:sp>
       <p:pic>
         <p:nvPicPr>
-          <p:cNvPr id="10" name="Picture 9" descr="gd4d601fb3e797e2f.png"/>
+          <p:cNvPr id="10" name="Picture 9" descr="geb02edf9f23b2ca0.png"/>
           <p:cNvPicPr>
             <a:picLocks noChangeAspect="1"/>
           </p:cNvPicPr>
@@ -5742,8 +5742,8 @@
         </p:blipFill>
         <p:spPr>
           <a:xfrm>
-            <a:off x="5079492" y="2998436"/>
-            <a:ext cx="2002536" cy="2269223"/>
+            <a:off x="4251959" y="2998436"/>
+            <a:ext cx="3657600" cy="1710607"/>
           </a:xfrm>
           <a:prstGeom prst="rect">
             <a:avLst/>
@@ -5758,7 +5758,7 @@
         </p:nvSpPr>
         <p:spPr>
           <a:xfrm>
-            <a:off x="777240" y="5551124"/>
+            <a:off x="777240" y="4992508"/>
             <a:ext cx="10607040" cy="457200"/>
           </a:xfrm>
           <a:prstGeom prst="rect">
@@ -6043,7 +6043,7 @@
                 </a:solidFill>
                 <a:latin typeface="Lexend"/>
               </a:rPr>
-              <a:t>A tablet screen is 6 inches wide and 8 inches tall.</a:t>
+              <a:t>A swimming pool is 12 m long and 5 m wide.</a:t>
             </a:r>
           </a:p>
         </p:txBody>
@@ -6085,7 +6085,7 @@
       </p:sp>
       <p:pic>
         <p:nvPicPr>
-          <p:cNvPr id="10" name="Picture 9" descr="gd4d601fb3e797e2f.png"/>
+          <p:cNvPr id="10" name="Picture 9" descr="geb02edf9f23b2ca0.png"/>
           <p:cNvPicPr>
             <a:picLocks noChangeAspect="1"/>
           </p:cNvPicPr>
@@ -6099,8 +6099,8 @@
         </p:blipFill>
         <p:spPr>
           <a:xfrm>
-            <a:off x="3572256" y="2998436"/>
-            <a:ext cx="2002536" cy="2269223"/>
+            <a:off x="2673096" y="2998436"/>
+            <a:ext cx="3657600" cy="1710607"/>
           </a:xfrm>
           <a:prstGeom prst="rect">
             <a:avLst/>
@@ -6109,7 +6109,7 @@
       </p:pic>
       <p:pic>
         <p:nvPicPr>
-          <p:cNvPr id="11" name="Picture 10" descr="3f19fa5341f20cd5.png"/>
+          <p:cNvPr id="11" name="Picture 10" descr="219a66f6baebe5d9.png"/>
           <p:cNvPicPr>
             <a:picLocks noChangeAspect="1"/>
           </p:cNvPicPr>
@@ -6123,8 +6123,8 @@
         </p:blipFill>
         <p:spPr>
           <a:xfrm>
-            <a:off x="6361175" y="3739189"/>
-            <a:ext cx="2282952" cy="262128"/>
+            <a:off x="7117080" y="3459882"/>
+            <a:ext cx="2429256" cy="262128"/>
           </a:xfrm>
           <a:prstGeom prst="rect">
             <a:avLst/>
@@ -6133,7 +6133,7 @@
       </p:pic>
       <p:pic>
         <p:nvPicPr>
-          <p:cNvPr id="12" name="Picture 11" descr="2716f0e30bc433d0.png"/>
+          <p:cNvPr id="12" name="Picture 11" descr="a191707692ea714e.png"/>
           <p:cNvPicPr>
             <a:picLocks noChangeAspect="1"/>
           </p:cNvPicPr>
@@ -6147,8 +6147,8 @@
         </p:blipFill>
         <p:spPr>
           <a:xfrm>
-            <a:off x="6361175" y="4211629"/>
-            <a:ext cx="1871472" cy="368808"/>
+            <a:off x="7117080" y="3932322"/>
+            <a:ext cx="1819656" cy="368808"/>
           </a:xfrm>
           <a:prstGeom prst="rect">
             <a:avLst/>
@@ -6163,7 +6163,7 @@
         </p:nvSpPr>
         <p:spPr>
           <a:xfrm>
-            <a:off x="777240" y="5551124"/>
+            <a:off x="777240" y="4992508"/>
             <a:ext cx="10607040" cy="548640"/>
           </a:xfrm>
           <a:prstGeom prst="rect">
@@ -6185,7 +6185,7 @@
                 </a:solidFill>
                 <a:latin typeface="Lexend"/>
               </a:rPr>
-              <a:t>Answer:   10 in</a:t>
+              <a:t>Answer:   13 m</a:t>
             </a:r>
           </a:p>
         </p:txBody>
@@ -8340,7 +8340,7 @@
                 </a:solidFill>
                 <a:latin typeface="Lexend"/>
               </a:rPr>
-              <a:t>A 20-ft ladder reaches 16 ft up a wall.</a:t>
+              <a:t>A 26-ft ladder reaches 24 ft up a wall.</a:t>
             </a:r>
           </a:p>
         </p:txBody>
@@ -8419,7 +8419,7 @@
                 </a:solidFill>
                 <a:latin typeface="Lexend"/>
               </a:rPr>
-              <a:t>12 ft</a:t>
+              <a:t>10 ft</a:t>
             </a:r>
           </a:p>
         </p:txBody>
@@ -8463,7 +8463,7 @@
                 </a:solidFill>
                 <a:latin typeface="Lexend"/>
               </a:rPr>
-              <a:t>25.6 ft</a:t>
+              <a:t>35.4 ft</a:t>
             </a:r>
           </a:p>
         </p:txBody>
@@ -8507,7 +8507,7 @@
                 </a:solidFill>
                 <a:latin typeface="Lexend"/>
               </a:rPr>
-              <a:t>4 ft</a:t>
+              <a:t>2 ft</a:t>
             </a:r>
           </a:p>
         </p:txBody>
@@ -8551,7 +8551,7 @@
                 </a:solidFill>
                 <a:latin typeface="Lexend"/>
               </a:rPr>
-              <a:t>144 ft</a:t>
+              <a:t>100 ft</a:t>
             </a:r>
           </a:p>
         </p:txBody>
@@ -8849,7 +8849,7 @@
                 </a:solidFill>
                 <a:latin typeface="Lexend"/>
               </a:rPr>
-              <a:t>A 20-ft ladder reaches 16 ft up a wall.</a:t>
+              <a:t>A 26-ft ladder reaches 24 ft up a wall.</a:t>
             </a:r>
           </a:p>
         </p:txBody>
@@ -8891,7 +8891,7 @@
       </p:sp>
       <p:pic>
         <p:nvPicPr>
-          <p:cNvPr id="10" name="Picture 9" descr="e53afea40bf0010e.png"/>
+          <p:cNvPr id="10" name="Picture 9" descr="0b6ac03f35af703f.png"/>
           <p:cNvPicPr>
             <a:picLocks noChangeAspect="1"/>
           </p:cNvPicPr>
@@ -8905,8 +8905,8 @@
         </p:blipFill>
         <p:spPr>
           <a:xfrm>
-            <a:off x="4547615" y="3116737"/>
-            <a:ext cx="3176016" cy="304800"/>
+            <a:off x="4585715" y="3113689"/>
+            <a:ext cx="3102864" cy="307848"/>
           </a:xfrm>
           <a:prstGeom prst="rect">
             <a:avLst/>
@@ -8915,7 +8915,7 @@
       </p:pic>
       <p:pic>
         <p:nvPicPr>
-          <p:cNvPr id="11" name="Picture 10" descr="439b221365061236.png"/>
+          <p:cNvPr id="11" name="Picture 10" descr="d8fba3b616ac0ce7.png"/>
           <p:cNvPicPr>
             <a:picLocks noChangeAspect="1"/>
           </p:cNvPicPr>
@@ -8929,8 +8929,8 @@
         </p:blipFill>
         <p:spPr>
           <a:xfrm>
-            <a:off x="4547615" y="3611084"/>
-            <a:ext cx="2243328" cy="432816"/>
+            <a:off x="4585715" y="3611084"/>
+            <a:ext cx="2249424" cy="432816"/>
           </a:xfrm>
           <a:prstGeom prst="rect">
             <a:avLst/>
@@ -8967,7 +8967,7 @@
                 </a:solidFill>
                 <a:latin typeface="Lexend"/>
               </a:rPr>
-              <a:t>Answer:   A — 12 ft</a:t>
+              <a:t>Answer:   A — 10 ft</a:t>
             </a:r>
           </a:p>
         </p:txBody>
@@ -10086,7 +10086,7 @@
                 </a:solidFill>
                 <a:latin typeface="Lexend"/>
               </a:rPr>
-              <a:t>A kite flies on 30 m of string, straight above a spot 18 m from where the string is held.</a:t>
+              <a:t>A drone is 30 m from Maya, straight above a spot on the ground 18 m from her.</a:t>
             </a:r>
           </a:p>
         </p:txBody>
@@ -10209,7 +10209,7 @@
                 </a:solidFill>
                 <a:latin typeface="Lexend"/>
               </a:rPr>
-              <a:t>the kite's height</a:t>
+              <a:t>the drone's height</a:t>
             </a:r>
           </a:p>
         </p:txBody>
@@ -10253,7 +10253,7 @@
                 </a:solidFill>
                 <a:latin typeface="Lexend"/>
               </a:rPr>
-              <a:t>the 30-m string</a:t>
+              <a:t>the 30 m to the drone</a:t>
             </a:r>
           </a:p>
         </p:txBody>
@@ -10595,7 +10595,7 @@
                 </a:solidFill>
                 <a:latin typeface="Lexend"/>
               </a:rPr>
-              <a:t>A kite flies on 30 m of string, straight above a spot 18 m from where the string is held.</a:t>
+              <a:t>A drone is 30 m from Maya, straight above a spot on the ground 18 m from her.</a:t>
             </a:r>
           </a:p>
         </p:txBody>
@@ -10643,8 +10643,8 @@
         </p:nvSpPr>
         <p:spPr>
           <a:xfrm>
-            <a:off x="2878356" y="3478099"/>
-            <a:ext cx="6541966" cy="457200"/>
+            <a:off x="2692917" y="3478099"/>
+            <a:ext cx="6912844" cy="457200"/>
           </a:xfrm>
           <a:prstGeom prst="rect">
             <a:avLst/>
@@ -10665,7 +10665,7 @@
                 </a:solidFill>
                 <a:latin typeface="Lexend"/>
               </a:rPr>
-              <a:t>The square corner is under the kite.</a:t>
+              <a:t>The square corner is under the drone.</a:t>
             </a:r>
           </a:p>
         </p:txBody>
@@ -10678,8 +10678,8 @@
         </p:nvSpPr>
         <p:spPr>
           <a:xfrm>
-            <a:off x="2878356" y="4017595"/>
-            <a:ext cx="4687026" cy="457200"/>
+            <a:off x="2692917" y="4017595"/>
+            <a:ext cx="6822972" cy="457200"/>
           </a:xfrm>
           <a:prstGeom prst="rect">
             <a:avLst/>
@@ -10700,7 +10700,7 @@
                 </a:solidFill>
                 <a:latin typeface="Lexend"/>
               </a:rPr>
-              <a:t>Across from it: the string.</a:t>
+              <a:t>Across from it: the 30 m to the drone.</a:t>
             </a:r>
           </a:p>
         </p:txBody>
@@ -10735,7 +10735,7 @@
                 </a:solidFill>
                 <a:latin typeface="Lexend"/>
               </a:rPr>
-              <a:t>Answer:   C — the 30-m string</a:t>
+              <a:t>Answer:   C — the 30 m to the drone</a:t>
             </a:r>
           </a:p>
         </p:txBody>
@@ -13721,7 +13721,7 @@
           <a:p>
             <a:pPr algn="l"/>
             <a:r>
-              <a:rPr sz="1710" b="1" i="0">
+              <a:rPr sz="1520" b="1" i="0">
                 <a:solidFill>
                   <a:srgbClr val="0B5394"/>
                 </a:solidFill>
@@ -13756,7 +13756,7 @@
           <a:p>
             <a:pPr algn="l"/>
             <a:r>
-              <a:rPr sz="1710" b="0" i="0">
+              <a:rPr sz="1520" b="0" i="0">
                 <a:solidFill>
                   <a:srgbClr val="1A1A1A"/>
                 </a:solidFill>
@@ -13775,7 +13775,7 @@
         </p:nvSpPr>
         <p:spPr>
           <a:xfrm>
-            <a:off x="960120" y="2414016"/>
+            <a:off x="960120" y="2386584"/>
             <a:ext cx="548640" cy="356616"/>
           </a:xfrm>
           <a:prstGeom prst="rect">
@@ -13791,7 +13791,7 @@
           <a:p>
             <a:pPr algn="l"/>
             <a:r>
-              <a:rPr sz="1710" b="1" i="0">
+              <a:rPr sz="1520" b="1" i="0">
                 <a:solidFill>
                   <a:srgbClr val="0B5394"/>
                 </a:solidFill>
@@ -13810,7 +13810,147 @@
         </p:nvSpPr>
         <p:spPr>
           <a:xfrm>
-            <a:off x="1554480" y="2414016"/>
+            <a:off x="1554480" y="2386584"/>
+            <a:ext cx="9829800" cy="411480"/>
+          </a:xfrm>
+          <a:prstGeom prst="rect">
+            <a:avLst/>
+          </a:prstGeom>
+          <a:noFill/>
+        </p:spPr>
+        <p:txBody>
+          <a:bodyPr wrap="square" lIns="45720" rIns="45720" tIns="18288" bIns="18288" anchor="t">
+            <a:spAutoFit/>
+          </a:bodyPr>
+          <a:lstStyle/>
+          <a:p>
+            <a:pPr algn="l"/>
+            <a:r>
+              <a:rPr sz="1520" b="0" i="0">
+                <a:solidFill>
+                  <a:srgbClr val="1A1A1A"/>
+                </a:solidFill>
+                <a:latin typeface="Lexend"/>
+              </a:rPr>
+              <a:t>A fire truck's 50-ft ladder reaches 48 ft up a building. How far from the building is its foot?</a:t>
+            </a:r>
+          </a:p>
+        </p:txBody>
+      </p:sp>
+      <p:sp>
+        <p:nvSpPr>
+          <p:cNvPr id="12" name="TextBox 11"/>
+          <p:cNvSpPr txBox="1"/>
+          <p:nvPr/>
+        </p:nvSpPr>
+        <p:spPr>
+          <a:xfrm>
+            <a:off x="960120" y="2843784"/>
+            <a:ext cx="548640" cy="356616"/>
+          </a:xfrm>
+          <a:prstGeom prst="rect">
+            <a:avLst/>
+          </a:prstGeom>
+          <a:noFill/>
+        </p:spPr>
+        <p:txBody>
+          <a:bodyPr wrap="square" lIns="45720" rIns="45720" tIns="18288" bIns="18288" anchor="t">
+            <a:spAutoFit/>
+          </a:bodyPr>
+          <a:lstStyle/>
+          <a:p>
+            <a:pPr algn="l"/>
+            <a:r>
+              <a:rPr sz="1520" b="1" i="0">
+                <a:solidFill>
+                  <a:srgbClr val="0B5394"/>
+                </a:solidFill>
+                <a:latin typeface="Lexend"/>
+              </a:rPr>
+              <a:t>3.</a:t>
+            </a:r>
+          </a:p>
+        </p:txBody>
+      </p:sp>
+      <p:sp>
+        <p:nvSpPr>
+          <p:cNvPr id="13" name="TextBox 12"/>
+          <p:cNvSpPr txBox="1"/>
+          <p:nvPr/>
+        </p:nvSpPr>
+        <p:spPr>
+          <a:xfrm>
+            <a:off x="1554480" y="2843784"/>
+            <a:ext cx="9829800" cy="411480"/>
+          </a:xfrm>
+          <a:prstGeom prst="rect">
+            <a:avLst/>
+          </a:prstGeom>
+          <a:noFill/>
+        </p:spPr>
+        <p:txBody>
+          <a:bodyPr wrap="square" lIns="45720" rIns="45720" tIns="18288" bIns="18288" anchor="t">
+            <a:spAutoFit/>
+          </a:bodyPr>
+          <a:lstStyle/>
+          <a:p>
+            <a:pPr algn="l"/>
+            <a:r>
+              <a:rPr sz="1520" b="0" i="0">
+                <a:solidFill>
+                  <a:srgbClr val="1A1A1A"/>
+                </a:solidFill>
+                <a:latin typeface="Lexend"/>
+              </a:rPr>
+              <a:t>A ramp rises 3 ft over a run of 14 ft. How long is the ramp, to the nearest tenth of a foot?</a:t>
+            </a:r>
+          </a:p>
+        </p:txBody>
+      </p:sp>
+      <p:sp>
+        <p:nvSpPr>
+          <p:cNvPr id="14" name="TextBox 13"/>
+          <p:cNvSpPr txBox="1"/>
+          <p:nvPr/>
+        </p:nvSpPr>
+        <p:spPr>
+          <a:xfrm>
+            <a:off x="960120" y="3300984"/>
+            <a:ext cx="548640" cy="356616"/>
+          </a:xfrm>
+          <a:prstGeom prst="rect">
+            <a:avLst/>
+          </a:prstGeom>
+          <a:noFill/>
+        </p:spPr>
+        <p:txBody>
+          <a:bodyPr wrap="square" lIns="45720" rIns="45720" tIns="18288" bIns="18288" anchor="t">
+            <a:spAutoFit/>
+          </a:bodyPr>
+          <a:lstStyle/>
+          <a:p>
+            <a:pPr algn="l"/>
+            <a:r>
+              <a:rPr sz="1520" b="1" i="0">
+                <a:solidFill>
+                  <a:srgbClr val="0B5394"/>
+                </a:solidFill>
+                <a:latin typeface="Lexend"/>
+              </a:rPr>
+              <a:t>4.</a:t>
+            </a:r>
+          </a:p>
+        </p:txBody>
+      </p:sp>
+      <p:sp>
+        <p:nvSpPr>
+          <p:cNvPr id="15" name="TextBox 14"/>
+          <p:cNvSpPr txBox="1"/>
+          <p:nvPr/>
+        </p:nvSpPr>
+        <p:spPr>
+          <a:xfrm>
+            <a:off x="1554480" y="3300984"/>
             <a:ext cx="9829800" cy="768096"/>
           </a:xfrm>
           <a:prstGeom prst="rect">
@@ -13826,26 +13966,26 @@
           <a:p>
             <a:pPr algn="l"/>
             <a:r>
-              <a:rPr sz="1710" b="0" i="0">
+              <a:rPr sz="1520" b="0" i="0">
                 <a:solidFill>
                   <a:srgbClr val="1A1A1A"/>
                 </a:solidFill>
                 <a:latin typeface="Lexend"/>
               </a:rPr>
-              <a:t>A fire truck's 50-ft ladder reaches 48 ft up a building. How far from the building is its foot?</a:t>
-            </a:r>
-          </a:p>
-        </p:txBody>
-      </p:sp>
-      <p:sp>
-        <p:nvSpPr>
-          <p:cNvPr id="12" name="TextBox 11"/>
-          <p:cNvSpPr txBox="1"/>
-          <p:nvPr/>
-        </p:nvSpPr>
-        <p:spPr>
-          <a:xfrm>
-            <a:off x="960120" y="3255264"/>
+              <a:t>A park is 7 m by 11 m. How much shorter is the walk straight across, corner to corner, than the walk along two sides? Give it to the nearest tenth of a meter.</a:t>
+            </a:r>
+          </a:p>
+        </p:txBody>
+      </p:sp>
+      <p:sp>
+        <p:nvSpPr>
+          <p:cNvPr id="16" name="TextBox 15"/>
+          <p:cNvSpPr txBox="1"/>
+          <p:nvPr/>
+        </p:nvSpPr>
+        <p:spPr>
+          <a:xfrm>
+            <a:off x="960120" y="4114800"/>
             <a:ext cx="548640" cy="356616"/>
           </a:xfrm>
           <a:prstGeom prst="rect">
@@ -13861,27 +14001,27 @@
           <a:p>
             <a:pPr algn="l"/>
             <a:r>
-              <a:rPr sz="1710" b="1" i="0">
+              <a:rPr sz="1520" b="1" i="0">
                 <a:solidFill>
                   <a:srgbClr val="0B5394"/>
                 </a:solidFill>
                 <a:latin typeface="Lexend"/>
               </a:rPr>
-              <a:t>3.</a:t>
-            </a:r>
-          </a:p>
-        </p:txBody>
-      </p:sp>
-      <p:sp>
-        <p:nvSpPr>
-          <p:cNvPr id="13" name="TextBox 12"/>
-          <p:cNvSpPr txBox="1"/>
-          <p:nvPr/>
-        </p:nvSpPr>
-        <p:spPr>
-          <a:xfrm>
-            <a:off x="1554480" y="3255264"/>
-            <a:ext cx="9829800" cy="768096"/>
+              <a:t>5.</a:t>
+            </a:r>
+          </a:p>
+        </p:txBody>
+      </p:sp>
+      <p:sp>
+        <p:nvSpPr>
+          <p:cNvPr id="17" name="TextBox 16"/>
+          <p:cNvSpPr txBox="1"/>
+          <p:nvPr/>
+        </p:nvSpPr>
+        <p:spPr>
+          <a:xfrm>
+            <a:off x="1554480" y="4114800"/>
+            <a:ext cx="9829800" cy="411480"/>
           </a:xfrm>
           <a:prstGeom prst="rect">
             <a:avLst/>
@@ -13896,26 +14036,26 @@
           <a:p>
             <a:pPr algn="l"/>
             <a:r>
-              <a:rPr sz="1710" b="0" i="0">
+              <a:rPr sz="1520" b="0" i="0">
                 <a:solidFill>
                   <a:srgbClr val="1A1A1A"/>
                 </a:solidFill>
                 <a:latin typeface="Lexend"/>
               </a:rPr>
-              <a:t>A ramp rises 3 ft over a run of 14 ft. How long is the ramp, to the nearest tenth of a foot?</a:t>
-            </a:r>
-          </a:p>
-        </p:txBody>
-      </p:sp>
-      <p:sp>
-        <p:nvSpPr>
-          <p:cNvPr id="14" name="TextBox 13"/>
-          <p:cNvSpPr txBox="1"/>
-          <p:nvPr/>
-        </p:nvSpPr>
-        <p:spPr>
-          <a:xfrm>
-            <a:off x="960120" y="4096512"/>
+              <a:t>Will a 10-in pencil lie flat in a box 7 inches by 8 inches, corner to corner?</a:t>
+            </a:r>
+          </a:p>
+        </p:txBody>
+      </p:sp>
+      <p:sp>
+        <p:nvSpPr>
+          <p:cNvPr id="18" name="TextBox 17"/>
+          <p:cNvSpPr txBox="1"/>
+          <p:nvPr/>
+        </p:nvSpPr>
+        <p:spPr>
+          <a:xfrm>
+            <a:off x="960120" y="4572000"/>
             <a:ext cx="548640" cy="356616"/>
           </a:xfrm>
           <a:prstGeom prst="rect">
@@ -13931,27 +14071,27 @@
           <a:p>
             <a:pPr algn="l"/>
             <a:r>
-              <a:rPr sz="1710" b="1" i="0">
+              <a:rPr sz="1520" b="1" i="0">
                 <a:solidFill>
                   <a:srgbClr val="0B5394"/>
                 </a:solidFill>
                 <a:latin typeface="Lexend"/>
               </a:rPr>
-              <a:t>4.</a:t>
-            </a:r>
-          </a:p>
-        </p:txBody>
-      </p:sp>
-      <p:sp>
-        <p:nvSpPr>
-          <p:cNvPr id="15" name="TextBox 14"/>
-          <p:cNvSpPr txBox="1"/>
-          <p:nvPr/>
-        </p:nvSpPr>
-        <p:spPr>
-          <a:xfrm>
-            <a:off x="1554480" y="4096512"/>
-            <a:ext cx="9829800" cy="768096"/>
+              <a:t>6.</a:t>
+            </a:r>
+          </a:p>
+        </p:txBody>
+      </p:sp>
+      <p:sp>
+        <p:nvSpPr>
+          <p:cNvPr id="19" name="TextBox 18"/>
+          <p:cNvSpPr txBox="1"/>
+          <p:nvPr/>
+        </p:nvSpPr>
+        <p:spPr>
+          <a:xfrm>
+            <a:off x="1554480" y="4572000"/>
+            <a:ext cx="9829800" cy="1124712"/>
           </a:xfrm>
           <a:prstGeom prst="rect">
             <a:avLst/>
@@ -13966,153 +14106,13 @@
           <a:p>
             <a:pPr algn="l"/>
             <a:r>
-              <a:rPr sz="1710" b="0" i="0">
+              <a:rPr sz="1520" b="0" i="0">
                 <a:solidFill>
                   <a:srgbClr val="1A1A1A"/>
                 </a:solidFill>
                 <a:latin typeface="Lexend"/>
               </a:rPr>
-              <a:t>A park is 7 m by 11 m. How much shorter is the walk straight across, corner to corner, than the walk along two sides? Give it to the nearest tenth of a meter.</a:t>
-            </a:r>
-          </a:p>
-        </p:txBody>
-      </p:sp>
-      <p:sp>
-        <p:nvSpPr>
-          <p:cNvPr id="16" name="TextBox 15"/>
-          <p:cNvSpPr txBox="1"/>
-          <p:nvPr/>
-        </p:nvSpPr>
-        <p:spPr>
-          <a:xfrm>
-            <a:off x="960120" y="4937760"/>
-            <a:ext cx="548640" cy="356616"/>
-          </a:xfrm>
-          <a:prstGeom prst="rect">
-            <a:avLst/>
-          </a:prstGeom>
-          <a:noFill/>
-        </p:spPr>
-        <p:txBody>
-          <a:bodyPr wrap="square" lIns="45720" rIns="45720" tIns="18288" bIns="18288" anchor="t">
-            <a:spAutoFit/>
-          </a:bodyPr>
-          <a:lstStyle/>
-          <a:p>
-            <a:pPr algn="l"/>
-            <a:r>
-              <a:rPr sz="1710" b="1" i="0">
-                <a:solidFill>
-                  <a:srgbClr val="0B5394"/>
-                </a:solidFill>
-                <a:latin typeface="Lexend"/>
-              </a:rPr>
-              <a:t>5.</a:t>
-            </a:r>
-          </a:p>
-        </p:txBody>
-      </p:sp>
-      <p:sp>
-        <p:nvSpPr>
-          <p:cNvPr id="17" name="TextBox 16"/>
-          <p:cNvSpPr txBox="1"/>
-          <p:nvPr/>
-        </p:nvSpPr>
-        <p:spPr>
-          <a:xfrm>
-            <a:off x="1554480" y="4937760"/>
-            <a:ext cx="9829800" cy="411480"/>
-          </a:xfrm>
-          <a:prstGeom prst="rect">
-            <a:avLst/>
-          </a:prstGeom>
-          <a:noFill/>
-        </p:spPr>
-        <p:txBody>
-          <a:bodyPr wrap="square" lIns="45720" rIns="45720" tIns="18288" bIns="18288" anchor="t">
-            <a:spAutoFit/>
-          </a:bodyPr>
-          <a:lstStyle/>
-          <a:p>
-            <a:pPr algn="l"/>
-            <a:r>
-              <a:rPr sz="1710" b="0" i="0">
-                <a:solidFill>
-                  <a:srgbClr val="1A1A1A"/>
-                </a:solidFill>
-                <a:latin typeface="Lexend"/>
-              </a:rPr>
-              <a:t>Will a 10-in pencil lie flat in a box 7 inches by 8 inches, corner to corner?</a:t>
-            </a:r>
-          </a:p>
-        </p:txBody>
-      </p:sp>
-      <p:sp>
-        <p:nvSpPr>
-          <p:cNvPr id="18" name="TextBox 17"/>
-          <p:cNvSpPr txBox="1"/>
-          <p:nvPr/>
-        </p:nvSpPr>
-        <p:spPr>
-          <a:xfrm>
-            <a:off x="960120" y="5422392"/>
-            <a:ext cx="548640" cy="356616"/>
-          </a:xfrm>
-          <a:prstGeom prst="rect">
-            <a:avLst/>
-          </a:prstGeom>
-          <a:noFill/>
-        </p:spPr>
-        <p:txBody>
-          <a:bodyPr wrap="square" lIns="45720" rIns="45720" tIns="18288" bIns="18288" anchor="t">
-            <a:spAutoFit/>
-          </a:bodyPr>
-          <a:lstStyle/>
-          <a:p>
-            <a:pPr algn="l"/>
-            <a:r>
-              <a:rPr sz="1710" b="1" i="0">
-                <a:solidFill>
-                  <a:srgbClr val="0B5394"/>
-                </a:solidFill>
-                <a:latin typeface="Lexend"/>
-              </a:rPr>
-              <a:t>6.</a:t>
-            </a:r>
-          </a:p>
-        </p:txBody>
-      </p:sp>
-      <p:sp>
-        <p:nvSpPr>
-          <p:cNvPr id="19" name="TextBox 18"/>
-          <p:cNvSpPr txBox="1"/>
-          <p:nvPr/>
-        </p:nvSpPr>
-        <p:spPr>
-          <a:xfrm>
-            <a:off x="1554480" y="5422392"/>
-            <a:ext cx="9829800" cy="768096"/>
-          </a:xfrm>
-          <a:prstGeom prst="rect">
-            <a:avLst/>
-          </a:prstGeom>
-          <a:noFill/>
-        </p:spPr>
-        <p:txBody>
-          <a:bodyPr wrap="square" lIns="45720" rIns="45720" tIns="18288" bIns="18288" anchor="t">
-            <a:spAutoFit/>
-          </a:bodyPr>
-          <a:lstStyle/>
-          <a:p>
-            <a:pPr algn="l"/>
-            <a:r>
-              <a:rPr sz="1710" b="0" i="0">
-                <a:solidFill>
-                  <a:srgbClr val="1A1A1A"/>
-                </a:solidFill>
-                <a:latin typeface="Lexend"/>
-              </a:rPr>
-              <a:t>A kite flies at the end of 25 m of string, straight above a spot 20 m from where the string is held. How high is the kite?</a:t>
+              <a:t>A kite flies on 19 m of tight string. It is straight above a spot 12 m from the hand that holds the string, level with the hand. How high above the hand is the kite, to the nearest tenth of a meter?</a:t>
             </a:r>
           </a:p>
         </p:txBody>
@@ -15685,7 +15685,7 @@
       </p:cxnSp>
       <p:pic>
         <p:nvPicPr>
-          <p:cNvPr id="10" name="Picture 9" descr="gfd5ddee4c5feff92.png"/>
+          <p:cNvPr id="10" name="Picture 9" descr="g5bc09f29cf592270.png"/>
           <p:cNvPicPr>
             <a:picLocks noChangeAspect="1"/>
           </p:cNvPicPr>
@@ -15699,8 +15699,8 @@
         </p:blipFill>
         <p:spPr>
           <a:xfrm>
-            <a:off x="3977639" y="1993392"/>
-            <a:ext cx="4206240" cy="1939298"/>
+            <a:off x="4718303" y="1993392"/>
+            <a:ext cx="2724912" cy="2002190"/>
           </a:xfrm>
           <a:prstGeom prst="rect">
             <a:avLst/>
@@ -15709,7 +15709,7 @@
       </p:pic>
       <p:pic>
         <p:nvPicPr>
-          <p:cNvPr id="11" name="Picture 10" descr="3485607edb5ad0fc.png"/>
+          <p:cNvPr id="11" name="Picture 10" descr="b439acede6872a9a.png"/>
           <p:cNvPicPr>
             <a:picLocks noChangeAspect="1"/>
           </p:cNvPicPr>
@@ -15723,8 +15723,8 @@
         </p:blipFill>
         <p:spPr>
           <a:xfrm>
-            <a:off x="3656075" y="4078994"/>
-            <a:ext cx="4849368" cy="341376"/>
+            <a:off x="3843528" y="4141886"/>
+            <a:ext cx="4474464" cy="341376"/>
           </a:xfrm>
           <a:prstGeom prst="rect">
             <a:avLst/>
@@ -15733,7 +15733,7 @@
       </p:pic>
       <p:pic>
         <p:nvPicPr>
-          <p:cNvPr id="12" name="Picture 11" descr="b433e3a5e16f763c.png"/>
+          <p:cNvPr id="12" name="Picture 11" descr="f5cca9bd60907ffe.png"/>
           <p:cNvPicPr>
             <a:picLocks noChangeAspect="1"/>
           </p:cNvPicPr>
@@ -15747,8 +15747,8 @@
         </p:blipFill>
         <p:spPr>
           <a:xfrm>
-            <a:off x="4893564" y="4764794"/>
-            <a:ext cx="2374392" cy="478536"/>
+            <a:off x="4858511" y="4827686"/>
+            <a:ext cx="2444496" cy="478536"/>
           </a:xfrm>
           <a:prstGeom prst="rect">
             <a:avLst/>
@@ -15763,7 +15763,7 @@
         </p:nvSpPr>
         <p:spPr>
           <a:xfrm>
-            <a:off x="987552" y="5581658"/>
+            <a:off x="987552" y="5644550"/>
             <a:ext cx="10131551" cy="475488"/>
           </a:xfrm>
           <a:prstGeom prst="rect">
@@ -15785,7 +15785,7 @@
                 </a:solidFill>
                 <a:latin typeface="Lexend"/>
               </a:rPr>
-              <a:t>The path is 13 m. Along two sides is 17 m: the path is 4 m shorter.</a:t>
+              <a:t>The path is 10 m. Along two sides is 14 m: the path is 4 m shorter.</a:t>
             </a:r>
           </a:p>
         </p:txBody>
@@ -16090,7 +16090,7 @@
       </p:cxnSp>
       <p:pic>
         <p:nvPicPr>
-          <p:cNvPr id="10" name="Picture 9" descr="g4fc4e71f3131bc6e.png"/>
+          <p:cNvPr id="10" name="Picture 9" descr="g9555e0952e2d1ac3.png"/>
           <p:cNvPicPr>
             <a:picLocks noChangeAspect="1"/>
           </p:cNvPicPr>

--- a/a7/build/out/u6/A7 6.04 Pythagorean Theorem in Real-World Problems - Slides.pptx
+++ b/a7/build/out/u6/A7 6.04 Pythagorean Theorem in Real-World Problems - Slides.pptx
@@ -4374,14 +4374,14 @@
                 </a:solidFill>
                 <a:latin typeface="Lexend"/>
               </a:rPr>
-              <a:t>A 12-ft ladder leans on a wall. Its foot is 5 ft from the wall.</a:t>
+              <a:t>An 8-ft ladder leans on a wall. Its foot is 3 ft from the wall.</a:t>
             </a:r>
           </a:p>
         </p:txBody>
       </p:sp>
       <p:pic>
         <p:nvPicPr>
-          <p:cNvPr id="9" name="Picture 8" descr="gdf66deaff3ad1222.png"/>
+          <p:cNvPr id="9" name="Picture 8" descr="ga98890fd4d3e4887.png"/>
           <p:cNvPicPr>
             <a:picLocks noChangeAspect="1"/>
           </p:cNvPicPr>
@@ -4395,8 +4395,8 @@
         </p:blipFill>
         <p:spPr>
           <a:xfrm>
-            <a:off x="5326379" y="2276458"/>
-            <a:ext cx="1508760" cy="2372686"/>
+            <a:off x="5381244" y="2276458"/>
+            <a:ext cx="1399032" cy="2385111"/>
           </a:xfrm>
           <a:prstGeom prst="rect">
             <a:avLst/>
@@ -4411,7 +4411,7 @@
         </p:nvSpPr>
         <p:spPr>
           <a:xfrm>
-            <a:off x="777240" y="4978329"/>
+            <a:off x="777240" y="4990754"/>
             <a:ext cx="10607040" cy="429370"/>
           </a:xfrm>
           <a:prstGeom prst="rect">
@@ -4668,7 +4668,7 @@
       </p:sp>
       <p:pic>
         <p:nvPicPr>
-          <p:cNvPr id="8" name="Picture 7" descr="a3ca4f2e3cf23816.png"/>
+          <p:cNvPr id="8" name="Picture 7" descr="b0c4c7c339b3c3c4.png"/>
           <p:cNvPicPr>
             <a:picLocks noChangeAspect="1"/>
           </p:cNvPicPr>
@@ -4683,7 +4683,7 @@
         <p:spPr>
           <a:xfrm>
             <a:off x="1828800" y="1920240"/>
-            <a:ext cx="4840224" cy="341376"/>
+            <a:ext cx="4041648" cy="341376"/>
           </a:xfrm>
           <a:prstGeom prst="rect">
             <a:avLst/>
@@ -4692,7 +4692,7 @@
       </p:pic>
       <p:pic>
         <p:nvPicPr>
-          <p:cNvPr id="9" name="Picture 8" descr="f6fe74ec98ff4c14.png"/>
+          <p:cNvPr id="9" name="Picture 8" descr="e6517a3b7c88d98b.png"/>
           <p:cNvPicPr>
             <a:picLocks noChangeAspect="1"/>
           </p:cNvPicPr>
@@ -4707,7 +4707,7 @@
         <p:spPr>
           <a:xfrm>
             <a:off x="1828800" y="2535936"/>
-            <a:ext cx="2691384" cy="478536"/>
+            <a:ext cx="2337816" cy="478536"/>
           </a:xfrm>
           <a:prstGeom prst="rect">
             <a:avLst/>
@@ -4744,7 +4744,7 @@
                 </a:solidFill>
                 <a:latin typeface="Lexend"/>
               </a:rPr>
-              <a:t>Answer:   It reaches about 10.9 ft up the wall.</a:t>
+              <a:t>Answer:   It reaches about 7.4 ft up the wall.</a:t>
             </a:r>
           </a:p>
         </p:txBody>
@@ -14112,7 +14112,7 @@
                 </a:solidFill>
                 <a:latin typeface="Lexend"/>
               </a:rPr>
-              <a:t>A kite flies on 19 m of tight string. It is straight above a spot 12 m from the hand that holds the string, level with the hand. How high above the hand is the kite, to the nearest tenth of a meter?</a:t>
+              <a:t>A kite flies on 19 m of tight string. Straight below the kite, level with the hand that holds the string, is a point 12 m from the hand. How high is the kite above that point, to the nearest tenth of a meter?</a:t>
             </a:r>
           </a:p>
         </p:txBody>
